--- a/QRNG_Presentation.pptx
+++ b/QRNG_Presentation.pptx
@@ -265,7 +265,7 @@
             <a:fld id="{C4D5ADD5-2BBC-4A94-8F86-D9013941F742}" type="datetimeFigureOut">
               <a:rPr lang="en-US"/>
               <a:pPr/>
-              <a:t>9/22/2025</a:t>
+              <a:t>1/6/2026</a:t>
             </a:fld>
             <a:endParaRPr lang="en-US"/>
           </a:p>
@@ -2287,7 +2287,7 @@
           <a:p>
             <a:fld id="{E60792E3-D524-454C-8AFD-A91972900BCB}" type="datetime1">
               <a:rPr lang="en-US" smtClean="0"/>
-              <a:t>9/22/2025</a:t>
+              <a:t>1/6/2026</a:t>
             </a:fld>
             <a:endParaRPr lang="en-US"/>
           </a:p>
@@ -2469,7 +2469,7 @@
           <a:p>
             <a:fld id="{053C3A68-6922-42D3-8905-ECC2D82A3469}" type="datetime1">
               <a:rPr lang="en-US" smtClean="0"/>
-              <a:t>9/22/2025</a:t>
+              <a:t>1/6/2026</a:t>
             </a:fld>
             <a:endParaRPr lang="en-US"/>
           </a:p>
@@ -2661,7 +2661,7 @@
           <a:p>
             <a:fld id="{CB69E9F4-7604-4950-A8B2-8ACDEDB1506E}" type="datetime1">
               <a:rPr lang="en-US" smtClean="0"/>
-              <a:t>9/22/2025</a:t>
+              <a:t>1/6/2026</a:t>
             </a:fld>
             <a:endParaRPr lang="en-US"/>
           </a:p>
@@ -2843,7 +2843,7 @@
           <a:p>
             <a:fld id="{708B7524-32A2-4C20-A58C-BC3BAA1042FC}" type="datetime1">
               <a:rPr lang="en-US" smtClean="0"/>
-              <a:t>9/22/2025</a:t>
+              <a:t>1/6/2026</a:t>
             </a:fld>
             <a:endParaRPr lang="en-US"/>
           </a:p>
@@ -3102,7 +3102,7 @@
           <a:p>
             <a:fld id="{1E994447-D6B2-43BB-A877-57F1A267B999}" type="datetime1">
               <a:rPr lang="en-US" smtClean="0"/>
-              <a:t>9/22/2025</a:t>
+              <a:t>1/6/2026</a:t>
             </a:fld>
             <a:endParaRPr lang="en-US"/>
           </a:p>
@@ -3401,7 +3401,7 @@
           <a:p>
             <a:fld id="{68920E16-BD35-483C-AA6B-346FC7E46DEA}" type="datetime1">
               <a:rPr lang="en-US" smtClean="0"/>
-              <a:t>9/22/2025</a:t>
+              <a:t>1/6/2026</a:t>
             </a:fld>
             <a:endParaRPr lang="en-US"/>
           </a:p>
@@ -3834,7 +3834,7 @@
           <a:p>
             <a:fld id="{2FEAC6F8-5103-4FC0-A69E-5C6AE6469DA8}" type="datetime1">
               <a:rPr lang="en-US" smtClean="0"/>
-              <a:t>9/22/2025</a:t>
+              <a:t>1/6/2026</a:t>
             </a:fld>
             <a:endParaRPr lang="en-US"/>
           </a:p>
@@ -3965,7 +3965,7 @@
           <a:p>
             <a:fld id="{C60C6921-0627-4C8F-83D5-0CF936D2FFDD}" type="datetime1">
               <a:rPr lang="en-US" smtClean="0"/>
-              <a:t>9/22/2025</a:t>
+              <a:t>1/6/2026</a:t>
             </a:fld>
             <a:endParaRPr lang="en-US"/>
           </a:p>
@@ -4074,7 +4074,7 @@
           <a:p>
             <a:fld id="{2FF08AD7-8103-40F8-983C-E2BA6BB9CBE0}" type="datetime1">
               <a:rPr lang="en-US" smtClean="0"/>
-              <a:t>9/22/2025</a:t>
+              <a:t>1/6/2026</a:t>
             </a:fld>
             <a:endParaRPr lang="en-US"/>
           </a:p>
@@ -4363,7 +4363,7 @@
           <a:p>
             <a:fld id="{DF8C06B4-9380-4A4D-AF49-A3596E17DAF5}" type="datetime1">
               <a:rPr lang="en-US" smtClean="0"/>
-              <a:t>9/22/2025</a:t>
+              <a:t>1/6/2026</a:t>
             </a:fld>
             <a:endParaRPr lang="en-US"/>
           </a:p>
@@ -4632,7 +4632,7 @@
           <a:p>
             <a:fld id="{EF7FDEF1-C582-4E22-9E77-D68326471F28}" type="datetime1">
               <a:rPr lang="en-US" smtClean="0"/>
-              <a:t>9/22/2025</a:t>
+              <a:t>1/6/2026</a:t>
             </a:fld>
             <a:endParaRPr lang="en-US"/>
           </a:p>
@@ -4875,7 +4875,7 @@
           <a:p>
             <a:fld id="{780A9602-A9A9-453F-AEF1-37B5837E02CD}" type="datetime1">
               <a:rPr lang="en-US" smtClean="0"/>
-              <a:t>9/22/2025</a:t>
+              <a:t>1/6/2026</a:t>
             </a:fld>
             <a:endParaRPr lang="en-US"/>
           </a:p>
@@ -6571,8 +6571,8 @@
         </p:blipFill>
         <p:spPr>
           <a:xfrm>
-            <a:off x="7918296" y="2135176"/>
-            <a:ext cx="2513346" cy="2876904"/>
+            <a:off x="7918296" y="2369649"/>
+            <a:ext cx="3416490" cy="3910689"/>
           </a:xfrm>
           <a:prstGeom prst="rect">
             <a:avLst/>
@@ -7627,6 +7627,37 @@
           </a:prstGeom>
         </p:spPr>
       </p:pic>
+      <p:pic>
+        <p:nvPicPr>
+          <p:cNvPr id="8" name="Picture 7">
+            <a:extLst>
+              <a:ext uri="{FF2B5EF4-FFF2-40B4-BE49-F238E27FC236}">
+                <a16:creationId xmlns:a16="http://schemas.microsoft.com/office/drawing/2014/main" id="{ED775AA8-C5A3-29E7-870A-81E61FF286E3}"/>
+              </a:ext>
+            </a:extLst>
+          </p:cNvPr>
+          <p:cNvPicPr>
+            <a:picLocks noChangeAspect="1"/>
+          </p:cNvPicPr>
+          <p:nvPr/>
+        </p:nvPicPr>
+        <p:blipFill>
+          <a:blip r:embed="rId5"/>
+          <a:srcRect l="4691" t="17427" r="4673" b="16517"/>
+          <a:stretch>
+            <a:fillRect/>
+          </a:stretch>
+        </p:blipFill>
+        <p:spPr>
+          <a:xfrm>
+            <a:off x="6941211" y="2359152"/>
+            <a:ext cx="5250789" cy="3826846"/>
+          </a:xfrm>
+          <a:prstGeom prst="rect">
+            <a:avLst/>
+          </a:prstGeom>
+        </p:spPr>
+      </p:pic>
     </p:spTree>
   </p:cSld>
   <p:clrMapOvr>
@@ -9701,36 +9732,6 @@
       </p:sp>
       <p:pic>
         <p:nvPicPr>
-          <p:cNvPr id="9" name="Picture 8">
-            <a:extLst>
-              <a:ext uri="{FF2B5EF4-FFF2-40B4-BE49-F238E27FC236}">
-                <a16:creationId xmlns:a16="http://schemas.microsoft.com/office/drawing/2014/main" id="{14057A4E-5F0B-4943-635E-22EB42C91A4C}"/>
-              </a:ext>
-            </a:extLst>
-          </p:cNvPr>
-          <p:cNvPicPr>
-            <a:picLocks noChangeAspect="1"/>
-          </p:cNvPicPr>
-          <p:nvPr/>
-        </p:nvPicPr>
-        <p:blipFill>
-          <a:blip r:embed="rId4"/>
-          <a:stretch>
-            <a:fillRect/>
-          </a:stretch>
-        </p:blipFill>
-        <p:spPr>
-          <a:xfrm>
-            <a:off x="6774326" y="2042712"/>
-            <a:ext cx="5417673" cy="2017224"/>
-          </a:xfrm>
-          <a:prstGeom prst="rect">
-            <a:avLst/>
-          </a:prstGeom>
-        </p:spPr>
-      </p:pic>
-      <p:pic>
-        <p:nvPicPr>
           <p:cNvPr id="13" name="Picture 12">
             <a:extLst>
               <a:ext uri="{FF2B5EF4-FFF2-40B4-BE49-F238E27FC236}">
@@ -9744,7 +9745,7 @@
           <p:nvPr/>
         </p:nvPicPr>
         <p:blipFill>
-          <a:blip r:embed="rId5"/>
+          <a:blip r:embed="rId4"/>
           <a:stretch>
             <a:fillRect/>
           </a:stretch>
@@ -9901,7 +9902,7 @@
           <p:nvPr/>
         </p:nvPicPr>
         <p:blipFill>
-          <a:blip r:embed="rId6"/>
+          <a:blip r:embed="rId5"/>
           <a:stretch>
             <a:fillRect/>
           </a:stretch>
@@ -9910,6 +9911,36 @@
           <a:xfrm>
             <a:off x="220888" y="37292"/>
             <a:ext cx="1068416" cy="1068416"/>
+          </a:xfrm>
+          <a:prstGeom prst="rect">
+            <a:avLst/>
+          </a:prstGeom>
+        </p:spPr>
+      </p:pic>
+      <p:pic>
+        <p:nvPicPr>
+          <p:cNvPr id="8" name="Picture 7">
+            <a:extLst>
+              <a:ext uri="{FF2B5EF4-FFF2-40B4-BE49-F238E27FC236}">
+                <a16:creationId xmlns:a16="http://schemas.microsoft.com/office/drawing/2014/main" id="{5212C5A6-543A-2FAA-12DE-3171903CD74C}"/>
+              </a:ext>
+            </a:extLst>
+          </p:cNvPr>
+          <p:cNvPicPr>
+            <a:picLocks noChangeAspect="1"/>
+          </p:cNvPicPr>
+          <p:nvPr/>
+        </p:nvPicPr>
+        <p:blipFill>
+          <a:blip r:embed="rId6"/>
+          <a:stretch>
+            <a:fillRect/>
+          </a:stretch>
+        </p:blipFill>
+        <p:spPr>
+          <a:xfrm>
+            <a:off x="6909417" y="2346246"/>
+            <a:ext cx="5061695" cy="1293159"/>
           </a:xfrm>
           <a:prstGeom prst="rect">
             <a:avLst/>
@@ -10612,36 +10643,6 @@
           </a:p>
         </p:txBody>
       </p:sp>
-      <p:pic>
-        <p:nvPicPr>
-          <p:cNvPr id="8" name="Picture 7">
-            <a:extLst>
-              <a:ext uri="{FF2B5EF4-FFF2-40B4-BE49-F238E27FC236}">
-                <a16:creationId xmlns:a16="http://schemas.microsoft.com/office/drawing/2014/main" id="{90A7D1CC-0380-ACEB-FBDC-CE6D8E5B6CD7}"/>
-              </a:ext>
-            </a:extLst>
-          </p:cNvPr>
-          <p:cNvPicPr>
-            <a:picLocks noChangeAspect="1"/>
-          </p:cNvPicPr>
-          <p:nvPr/>
-        </p:nvPicPr>
-        <p:blipFill>
-          <a:blip r:embed="rId4"/>
-          <a:stretch>
-            <a:fillRect/>
-          </a:stretch>
-        </p:blipFill>
-        <p:spPr>
-          <a:xfrm>
-            <a:off x="7313753" y="2945357"/>
-            <a:ext cx="4268647" cy="3116926"/>
-          </a:xfrm>
-          <a:prstGeom prst="rect">
-            <a:avLst/>
-          </a:prstGeom>
-        </p:spPr>
-      </p:pic>
       <p:sp>
         <p:nvSpPr>
           <p:cNvPr id="9" name="TextBox 8">
@@ -10656,7 +10657,7 @@
         </p:nvSpPr>
         <p:spPr>
           <a:xfrm>
-            <a:off x="6912315" y="2325663"/>
+            <a:off x="6769440" y="1468413"/>
             <a:ext cx="5263728" cy="430887"/>
           </a:xfrm>
           <a:prstGeom prst="rect">
@@ -10735,7 +10736,7 @@
           <p:nvPr/>
         </p:nvPicPr>
         <p:blipFill>
-          <a:blip r:embed="rId5"/>
+          <a:blip r:embed="rId4"/>
           <a:stretch>
             <a:fillRect/>
           </a:stretch>
@@ -10744,6 +10745,37 @@
           <a:xfrm>
             <a:off x="220888" y="37292"/>
             <a:ext cx="1068416" cy="1068416"/>
+          </a:xfrm>
+          <a:prstGeom prst="rect">
+            <a:avLst/>
+          </a:prstGeom>
+        </p:spPr>
+      </p:pic>
+      <p:pic>
+        <p:nvPicPr>
+          <p:cNvPr id="11" name="Picture 10">
+            <a:extLst>
+              <a:ext uri="{FF2B5EF4-FFF2-40B4-BE49-F238E27FC236}">
+                <a16:creationId xmlns:a16="http://schemas.microsoft.com/office/drawing/2014/main" id="{982CBA10-D4DE-BB61-926C-2BCE459BBB31}"/>
+              </a:ext>
+            </a:extLst>
+          </p:cNvPr>
+          <p:cNvPicPr>
+            <a:picLocks noChangeAspect="1"/>
+          </p:cNvPicPr>
+          <p:nvPr/>
+        </p:nvPicPr>
+        <p:blipFill>
+          <a:blip r:embed="rId5"/>
+          <a:srcRect l="9208" t="2411" r="6895" b="2474"/>
+          <a:stretch>
+            <a:fillRect/>
+          </a:stretch>
+        </p:blipFill>
+        <p:spPr>
+          <a:xfrm>
+            <a:off x="6903722" y="1920017"/>
+            <a:ext cx="4910324" cy="4311309"/>
           </a:xfrm>
           <a:prstGeom prst="rect">
             <a:avLst/>
@@ -11307,36 +11339,6 @@
           </a:p>
         </p:txBody>
       </p:sp>
-      <p:pic>
-        <p:nvPicPr>
-          <p:cNvPr id="8" name="Picture 7">
-            <a:extLst>
-              <a:ext uri="{FF2B5EF4-FFF2-40B4-BE49-F238E27FC236}">
-                <a16:creationId xmlns:a16="http://schemas.microsoft.com/office/drawing/2014/main" id="{CC991B7C-7F72-BE05-2458-14D0DD2447F1}"/>
-              </a:ext>
-            </a:extLst>
-          </p:cNvPr>
-          <p:cNvPicPr>
-            <a:picLocks noChangeAspect="1"/>
-          </p:cNvPicPr>
-          <p:nvPr/>
-        </p:nvPicPr>
-        <p:blipFill>
-          <a:blip r:embed="rId4"/>
-          <a:stretch>
-            <a:fillRect/>
-          </a:stretch>
-        </p:blipFill>
-        <p:spPr>
-          <a:xfrm>
-            <a:off x="7207074" y="2442437"/>
-            <a:ext cx="4268647" cy="3116926"/>
-          </a:xfrm>
-          <a:prstGeom prst="rect">
-            <a:avLst/>
-          </a:prstGeom>
-        </p:spPr>
-      </p:pic>
       <p:sp>
         <p:nvSpPr>
           <p:cNvPr id="9" name="TextBox 8">
@@ -11430,7 +11432,7 @@
           <p:nvPr/>
         </p:nvPicPr>
         <p:blipFill>
-          <a:blip r:embed="rId5"/>
+          <a:blip r:embed="rId4"/>
           <a:stretch>
             <a:fillRect/>
           </a:stretch>
@@ -11439,6 +11441,37 @@
           <a:xfrm>
             <a:off x="220888" y="37292"/>
             <a:ext cx="1068416" cy="1068416"/>
+          </a:xfrm>
+          <a:prstGeom prst="rect">
+            <a:avLst/>
+          </a:prstGeom>
+        </p:spPr>
+      </p:pic>
+      <p:pic>
+        <p:nvPicPr>
+          <p:cNvPr id="11" name="Picture 10">
+            <a:extLst>
+              <a:ext uri="{FF2B5EF4-FFF2-40B4-BE49-F238E27FC236}">
+                <a16:creationId xmlns:a16="http://schemas.microsoft.com/office/drawing/2014/main" id="{F7803454-FB5D-541C-7777-499564417D54}"/>
+              </a:ext>
+            </a:extLst>
+          </p:cNvPr>
+          <p:cNvPicPr>
+            <a:picLocks noChangeAspect="1"/>
+          </p:cNvPicPr>
+          <p:nvPr/>
+        </p:nvPicPr>
+        <p:blipFill>
+          <a:blip r:embed="rId5"/>
+          <a:srcRect l="17579" t="27351" r="8758" b="40400"/>
+          <a:stretch>
+            <a:fillRect/>
+          </a:stretch>
+        </p:blipFill>
+        <p:spPr>
+          <a:xfrm>
+            <a:off x="6784300" y="2193829"/>
+            <a:ext cx="5093756" cy="3393156"/>
           </a:xfrm>
           <a:prstGeom prst="rect">
             <a:avLst/>

--- a/QRNG_Presentation.pptx
+++ b/QRNG_Presentation.pptx
@@ -625,6 +625,13 @@
             <a:tailEnd/>
           </a:ln>
         </p:spPr>
+        <p:txBody>
+          <a:bodyPr/>
+          <a:lstStyle/>
+          <a:p>
+            <a:endParaRPr lang="en-IN"/>
+          </a:p>
+        </p:txBody>
       </p:sp>
       <p:sp>
         <p:nvSpPr>
@@ -744,6 +751,13 @@
             <a:tailEnd/>
           </a:ln>
         </p:spPr>
+        <p:txBody>
+          <a:bodyPr/>
+          <a:lstStyle/>
+          <a:p>
+            <a:endParaRPr lang="en-IN"/>
+          </a:p>
+        </p:txBody>
       </p:sp>
       <p:sp>
         <p:nvSpPr>
@@ -875,6 +889,13 @@
             <a:tailEnd/>
           </a:ln>
         </p:spPr>
+        <p:txBody>
+          <a:bodyPr/>
+          <a:lstStyle/>
+          <a:p>
+            <a:endParaRPr lang="en-IN"/>
+          </a:p>
+        </p:txBody>
       </p:sp>
       <p:sp>
         <p:nvSpPr>
@@ -1006,6 +1027,13 @@
             <a:tailEnd/>
           </a:ln>
         </p:spPr>
+        <p:txBody>
+          <a:bodyPr/>
+          <a:lstStyle/>
+          <a:p>
+            <a:endParaRPr lang="en-IN"/>
+          </a:p>
+        </p:txBody>
       </p:sp>
       <p:sp>
         <p:nvSpPr>
@@ -1184,6 +1212,13 @@
             <a:tailEnd/>
           </a:ln>
         </p:spPr>
+        <p:txBody>
+          <a:bodyPr/>
+          <a:lstStyle/>
+          <a:p>
+            <a:endParaRPr lang="en-IN"/>
+          </a:p>
+        </p:txBody>
       </p:sp>
       <p:sp>
         <p:nvSpPr>
@@ -1374,6 +1409,13 @@
             <a:tailEnd/>
           </a:ln>
         </p:spPr>
+        <p:txBody>
+          <a:bodyPr/>
+          <a:lstStyle/>
+          <a:p>
+            <a:endParaRPr lang="en-IN"/>
+          </a:p>
+        </p:txBody>
       </p:sp>
       <p:sp>
         <p:nvSpPr>
@@ -1564,6 +1606,13 @@
             <a:tailEnd/>
           </a:ln>
         </p:spPr>
+        <p:txBody>
+          <a:bodyPr/>
+          <a:lstStyle/>
+          <a:p>
+            <a:endParaRPr lang="en-IN"/>
+          </a:p>
+        </p:txBody>
       </p:sp>
       <p:sp>
         <p:nvSpPr>
@@ -1754,6 +1803,13 @@
             <a:tailEnd/>
           </a:ln>
         </p:spPr>
+        <p:txBody>
+          <a:bodyPr/>
+          <a:lstStyle/>
+          <a:p>
+            <a:endParaRPr lang="en-IN"/>
+          </a:p>
+        </p:txBody>
       </p:sp>
       <p:sp>
         <p:nvSpPr>
@@ -1956,6 +2012,13 @@
             <a:tailEnd/>
           </a:ln>
         </p:spPr>
+        <p:txBody>
+          <a:bodyPr/>
+          <a:lstStyle/>
+          <a:p>
+            <a:endParaRPr lang="en-IN"/>
+          </a:p>
+        </p:txBody>
       </p:sp>
       <p:sp>
         <p:nvSpPr>
@@ -8004,20 +8067,6 @@
               <a:t> Backend → </a:t>
             </a:r>
             <a:r>
-              <a:rPr kumimoji="0" lang="en-US" altLang="en-US" b="0" i="1" u="none" strike="noStrike" cap="none" normalizeH="0" baseline="0" dirty="0" err="1">
-                <a:ln>
-                  <a:noFill/>
-                </a:ln>
-                <a:solidFill>
-                  <a:schemeClr val="tx1"/>
-                </a:solidFill>
-                <a:effectLst/>
-                <a:latin typeface="Times New Roman" panose="02020603050405020304" pitchFamily="18" charset="0"/>
-                <a:cs typeface="Times New Roman" panose="02020603050405020304" pitchFamily="18" charset="0"/>
-              </a:rPr>
-              <a:t>FastAPI</a:t>
-            </a:r>
-            <a:r>
               <a:rPr kumimoji="0" lang="en-US" altLang="en-US" b="0" i="1" u="none" strike="noStrike" cap="none" normalizeH="0" baseline="0" dirty="0">
                 <a:ln>
                   <a:noFill/>
@@ -8029,35 +8078,7 @@
                 <a:latin typeface="Times New Roman" panose="02020603050405020304" pitchFamily="18" charset="0"/>
                 <a:cs typeface="Times New Roman" panose="02020603050405020304" pitchFamily="18" charset="0"/>
               </a:rPr>
-              <a:t>, Python packages(NumPy, SciPy, </a:t>
-            </a:r>
-            <a:r>
-              <a:rPr kumimoji="0" lang="en-US" altLang="en-US" b="0" i="1" u="none" strike="noStrike" cap="none" normalizeH="0" baseline="0" dirty="0" err="1">
-                <a:ln>
-                  <a:noFill/>
-                </a:ln>
-                <a:solidFill>
-                  <a:schemeClr val="tx1"/>
-                </a:solidFill>
-                <a:effectLst/>
-                <a:latin typeface="Times New Roman" panose="02020603050405020304" pitchFamily="18" charset="0"/>
-                <a:cs typeface="Times New Roman" panose="02020603050405020304" pitchFamily="18" charset="0"/>
-              </a:rPr>
-              <a:t>Qiskit</a:t>
-            </a:r>
-            <a:r>
-              <a:rPr kumimoji="0" lang="en-US" altLang="en-US" b="0" i="1" u="none" strike="noStrike" cap="none" normalizeH="0" baseline="0" dirty="0">
-                <a:ln>
-                  <a:noFill/>
-                </a:ln>
-                <a:solidFill>
-                  <a:schemeClr val="tx1"/>
-                </a:solidFill>
-                <a:effectLst/>
-                <a:latin typeface="Times New Roman" panose="02020603050405020304" pitchFamily="18" charset="0"/>
-                <a:cs typeface="Times New Roman" panose="02020603050405020304" pitchFamily="18" charset="0"/>
-              </a:rPr>
-              <a:t>)</a:t>
+              <a:t>Fast API, Python packages(NumPy, SciPy, Qiskit)</a:t>
             </a:r>
             <a:endParaRPr kumimoji="0" lang="en-US" altLang="en-US" b="0" i="0" u="none" strike="noStrike" cap="none" normalizeH="0" baseline="0" dirty="0">
               <a:ln>
@@ -8094,20 +8115,13 @@
               <a:t> Frontend → </a:t>
             </a:r>
             <a:r>
-              <a:rPr kumimoji="0" lang="en-US" altLang="en-US" b="0" i="1" u="none" strike="noStrike" cap="none" normalizeH="0" baseline="0" dirty="0">
-                <a:ln>
-                  <a:noFill/>
-                </a:ln>
-                <a:solidFill>
-                  <a:schemeClr val="tx1"/>
-                </a:solidFill>
-                <a:effectLst/>
-                <a:latin typeface="Times New Roman" panose="02020603050405020304" pitchFamily="18" charset="0"/>
-                <a:cs typeface="Times New Roman" panose="02020603050405020304" pitchFamily="18" charset="0"/>
-              </a:rPr>
-              <a:t>React, Tailwind, Chart.js</a:t>
-            </a:r>
-            <a:endParaRPr kumimoji="0" lang="en-US" altLang="en-US" b="0" i="0" u="none" strike="noStrike" cap="none" normalizeH="0" baseline="0" dirty="0">
+              <a:rPr lang="en-IN" i="1" dirty="0">
+                <a:latin typeface="Times New Roman" panose="02020603050405020304" pitchFamily="18" charset="0"/>
+                <a:cs typeface="Times New Roman" panose="02020603050405020304" pitchFamily="18" charset="0"/>
+              </a:rPr>
+              <a:t>React + Vite + JavaScript</a:t>
+            </a:r>
+            <a:endParaRPr kumimoji="0" lang="en-US" altLang="en-US" b="0" i="1" u="none" strike="noStrike" cap="none" normalizeH="0" baseline="0" dirty="0">
               <a:ln>
                 <a:noFill/>
               </a:ln>
@@ -9414,35 +9428,7 @@
                 <a:latin typeface="Times New Roman" panose="02020603050405020304" pitchFamily="18" charset="0"/>
                 <a:cs typeface="Times New Roman" panose="02020603050405020304" pitchFamily="18" charset="0"/>
               </a:rPr>
-              <a:t> Works on simulators (</a:t>
-            </a:r>
-            <a:r>
-              <a:rPr kumimoji="0" lang="en-US" altLang="en-US" b="0" i="0" u="none" strike="noStrike" cap="none" normalizeH="0" baseline="0" dirty="0" err="1">
-                <a:ln>
-                  <a:noFill/>
-                </a:ln>
-                <a:solidFill>
-                  <a:schemeClr val="tx1"/>
-                </a:solidFill>
-                <a:effectLst/>
-                <a:latin typeface="Times New Roman" panose="02020603050405020304" pitchFamily="18" charset="0"/>
-                <a:cs typeface="Times New Roman" panose="02020603050405020304" pitchFamily="18" charset="0"/>
-              </a:rPr>
-              <a:t>Qiskit</a:t>
-            </a:r>
-            <a:r>
-              <a:rPr kumimoji="0" lang="en-US" altLang="en-US" b="0" i="0" u="none" strike="noStrike" cap="none" normalizeH="0" baseline="0" dirty="0">
-                <a:ln>
-                  <a:noFill/>
-                </a:ln>
-                <a:solidFill>
-                  <a:schemeClr val="tx1"/>
-                </a:solidFill>
-                <a:effectLst/>
-                <a:latin typeface="Times New Roman" panose="02020603050405020304" pitchFamily="18" charset="0"/>
-                <a:cs typeface="Times New Roman" panose="02020603050405020304" pitchFamily="18" charset="0"/>
-              </a:rPr>
-              <a:t> Aer) or real IBMQ hardware.</a:t>
+              <a:t> Works on simulators (Qiskit Aer) or real IBMQ hardware.</a:t>
             </a:r>
           </a:p>
           <a:p>
